--- a/Challenge_data/fraude.pptx
+++ b/Challenge_data/fraude.pptx
@@ -4,6 +4,9 @@
   <p:sldMasterIdLst>
     <p:sldMasterId id="2147483648" r:id="rId1"/>
   </p:sldMasterIdLst>
+  <p:notesMasterIdLst>
+    <p:notesMasterId r:id="rId12"/>
+  </p:notesMasterIdLst>
   <p:sldIdLst>
     <p:sldId id="256" r:id="rId2"/>
     <p:sldId id="265" r:id="rId3"/>
@@ -14,6 +17,7 @@
     <p:sldId id="266" r:id="rId8"/>
     <p:sldId id="264" r:id="rId9"/>
     <p:sldId id="269" r:id="rId10"/>
+    <p:sldId id="272" r:id="rId11"/>
   </p:sldIdLst>
   <p:sldSz cx="12192000" cy="6858000"/>
   <p:notesSz cx="6858000" cy="9144000"/>
@@ -120,6 +124,439 @@
 </p:presentation>
 </file>
 
+<file path=ppt/notesMasters/notesMaster1.xml><?xml version="1.0" encoding="utf-8"?>
+<p:notesMaster xmlns:a="http://schemas.openxmlformats.org/drawingml/2006/main" xmlns:r="http://schemas.openxmlformats.org/officeDocument/2006/relationships" xmlns:p="http://schemas.openxmlformats.org/presentationml/2006/main">
+  <p:cSld>
+    <p:bg>
+      <p:bgRef idx="1001">
+        <a:schemeClr val="bg1"/>
+      </p:bgRef>
+    </p:bg>
+    <p:spTree>
+      <p:nvGrpSpPr>
+        <p:cNvPr id="1" name=""/>
+        <p:cNvGrpSpPr/>
+        <p:nvPr/>
+      </p:nvGrpSpPr>
+      <p:grpSpPr>
+        <a:xfrm>
+          <a:off x="0" y="0"/>
+          <a:ext cx="0" cy="0"/>
+          <a:chOff x="0" y="0"/>
+          <a:chExt cx="0" cy="0"/>
+        </a:xfrm>
+      </p:grpSpPr>
+      <p:sp>
+        <p:nvSpPr>
+          <p:cNvPr id="2" name="Espace réservé de l'en-tête 1"/>
+          <p:cNvSpPr>
+            <a:spLocks noGrp="1"/>
+          </p:cNvSpPr>
+          <p:nvPr>
+            <p:ph type="hdr" sz="quarter"/>
+          </p:nvPr>
+        </p:nvSpPr>
+        <p:spPr>
+          <a:xfrm>
+            <a:off x="0" y="0"/>
+            <a:ext cx="2971800" cy="458788"/>
+          </a:xfrm>
+          <a:prstGeom prst="rect">
+            <a:avLst/>
+          </a:prstGeom>
+        </p:spPr>
+        <p:txBody>
+          <a:bodyPr vert="horz" lIns="91440" tIns="45720" rIns="91440" bIns="45720" rtlCol="0"/>
+          <a:lstStyle>
+            <a:lvl1pPr algn="l">
+              <a:defRPr sz="1200"/>
+            </a:lvl1pPr>
+          </a:lstStyle>
+          <a:p>
+            <a:endParaRPr lang="fr-FR"/>
+          </a:p>
+        </p:txBody>
+      </p:sp>
+      <p:sp>
+        <p:nvSpPr>
+          <p:cNvPr id="3" name="Espace réservé de la date 2"/>
+          <p:cNvSpPr>
+            <a:spLocks noGrp="1"/>
+          </p:cNvSpPr>
+          <p:nvPr>
+            <p:ph type="dt" idx="1"/>
+          </p:nvPr>
+        </p:nvSpPr>
+        <p:spPr>
+          <a:xfrm>
+            <a:off x="3884613" y="0"/>
+            <a:ext cx="2971800" cy="458788"/>
+          </a:xfrm>
+          <a:prstGeom prst="rect">
+            <a:avLst/>
+          </a:prstGeom>
+        </p:spPr>
+        <p:txBody>
+          <a:bodyPr vert="horz" lIns="91440" tIns="45720" rIns="91440" bIns="45720" rtlCol="0"/>
+          <a:lstStyle>
+            <a:lvl1pPr algn="r">
+              <a:defRPr sz="1200"/>
+            </a:lvl1pPr>
+          </a:lstStyle>
+          <a:p>
+            <a:fld id="{0EE14F2E-D2E3-402F-ADF4-D6B6B6B5BBE3}" type="datetimeFigureOut">
+              <a:rPr lang="fr-FR" smtClean="0"/>
+              <a:t>09/02/2026</a:t>
+            </a:fld>
+            <a:endParaRPr lang="fr-FR"/>
+          </a:p>
+        </p:txBody>
+      </p:sp>
+      <p:sp>
+        <p:nvSpPr>
+          <p:cNvPr id="4" name="Espace réservé de l'image des diapositives 3"/>
+          <p:cNvSpPr>
+            <a:spLocks noGrp="1" noRot="1" noChangeAspect="1"/>
+          </p:cNvSpPr>
+          <p:nvPr>
+            <p:ph type="sldImg" idx="2"/>
+          </p:nvPr>
+        </p:nvSpPr>
+        <p:spPr>
+          <a:xfrm>
+            <a:off x="685800" y="1143000"/>
+            <a:ext cx="5486400" cy="3086100"/>
+          </a:xfrm>
+          <a:prstGeom prst="rect">
+            <a:avLst/>
+          </a:prstGeom>
+          <a:noFill/>
+          <a:ln w="12700">
+            <a:solidFill>
+              <a:prstClr val="black"/>
+            </a:solidFill>
+          </a:ln>
+        </p:spPr>
+        <p:txBody>
+          <a:bodyPr vert="horz" lIns="91440" tIns="45720" rIns="91440" bIns="45720" rtlCol="0" anchor="ctr"/>
+          <a:lstStyle/>
+          <a:p>
+            <a:endParaRPr lang="fr-FR"/>
+          </a:p>
+        </p:txBody>
+      </p:sp>
+      <p:sp>
+        <p:nvSpPr>
+          <p:cNvPr id="5" name="Espace réservé des notes 4"/>
+          <p:cNvSpPr>
+            <a:spLocks noGrp="1"/>
+          </p:cNvSpPr>
+          <p:nvPr>
+            <p:ph type="body" sz="quarter" idx="3"/>
+          </p:nvPr>
+        </p:nvSpPr>
+        <p:spPr>
+          <a:xfrm>
+            <a:off x="685800" y="4400550"/>
+            <a:ext cx="5486400" cy="3600450"/>
+          </a:xfrm>
+          <a:prstGeom prst="rect">
+            <a:avLst/>
+          </a:prstGeom>
+        </p:spPr>
+        <p:txBody>
+          <a:bodyPr vert="horz" lIns="91440" tIns="45720" rIns="91440" bIns="45720" rtlCol="0"/>
+          <a:lstStyle/>
+          <a:p>
+            <a:pPr lvl="0"/>
+            <a:r>
+              <a:rPr lang="fr-FR"/>
+              <a:t>Cliquez pour modifier les styles du texte du masque</a:t>
+            </a:r>
+          </a:p>
+          <a:p>
+            <a:pPr lvl="1"/>
+            <a:r>
+              <a:rPr lang="fr-FR"/>
+              <a:t>Deuxième niveau</a:t>
+            </a:r>
+          </a:p>
+          <a:p>
+            <a:pPr lvl="2"/>
+            <a:r>
+              <a:rPr lang="fr-FR"/>
+              <a:t>Troisième niveau</a:t>
+            </a:r>
+          </a:p>
+          <a:p>
+            <a:pPr lvl="3"/>
+            <a:r>
+              <a:rPr lang="fr-FR"/>
+              <a:t>Quatrième niveau</a:t>
+            </a:r>
+          </a:p>
+          <a:p>
+            <a:pPr lvl="4"/>
+            <a:r>
+              <a:rPr lang="fr-FR"/>
+              <a:t>Cinquième niveau</a:t>
+            </a:r>
+          </a:p>
+        </p:txBody>
+      </p:sp>
+      <p:sp>
+        <p:nvSpPr>
+          <p:cNvPr id="6" name="Espace réservé du pied de page 5"/>
+          <p:cNvSpPr>
+            <a:spLocks noGrp="1"/>
+          </p:cNvSpPr>
+          <p:nvPr>
+            <p:ph type="ftr" sz="quarter" idx="4"/>
+          </p:nvPr>
+        </p:nvSpPr>
+        <p:spPr>
+          <a:xfrm>
+            <a:off x="0" y="8685213"/>
+            <a:ext cx="2971800" cy="458787"/>
+          </a:xfrm>
+          <a:prstGeom prst="rect">
+            <a:avLst/>
+          </a:prstGeom>
+        </p:spPr>
+        <p:txBody>
+          <a:bodyPr vert="horz" lIns="91440" tIns="45720" rIns="91440" bIns="45720" rtlCol="0" anchor="b"/>
+          <a:lstStyle>
+            <a:lvl1pPr algn="l">
+              <a:defRPr sz="1200"/>
+            </a:lvl1pPr>
+          </a:lstStyle>
+          <a:p>
+            <a:endParaRPr lang="fr-FR"/>
+          </a:p>
+        </p:txBody>
+      </p:sp>
+      <p:sp>
+        <p:nvSpPr>
+          <p:cNvPr id="7" name="Espace réservé du numéro de diapositive 6"/>
+          <p:cNvSpPr>
+            <a:spLocks noGrp="1"/>
+          </p:cNvSpPr>
+          <p:nvPr>
+            <p:ph type="sldNum" sz="quarter" idx="5"/>
+          </p:nvPr>
+        </p:nvSpPr>
+        <p:spPr>
+          <a:xfrm>
+            <a:off x="3884613" y="8685213"/>
+            <a:ext cx="2971800" cy="458787"/>
+          </a:xfrm>
+          <a:prstGeom prst="rect">
+            <a:avLst/>
+          </a:prstGeom>
+        </p:spPr>
+        <p:txBody>
+          <a:bodyPr vert="horz" lIns="91440" tIns="45720" rIns="91440" bIns="45720" rtlCol="0" anchor="b"/>
+          <a:lstStyle>
+            <a:lvl1pPr algn="r">
+              <a:defRPr sz="1200"/>
+            </a:lvl1pPr>
+          </a:lstStyle>
+          <a:p>
+            <a:fld id="{42646616-886F-4C38-916D-5C3E8C2E94DA}" type="slidenum">
+              <a:rPr lang="fr-FR" smtClean="0"/>
+              <a:t>‹N°›</a:t>
+            </a:fld>
+            <a:endParaRPr lang="fr-FR"/>
+          </a:p>
+        </p:txBody>
+      </p:sp>
+    </p:spTree>
+    <p:extLst>
+      <p:ext uri="{BB962C8B-B14F-4D97-AF65-F5344CB8AC3E}">
+        <p14:creationId xmlns:p14="http://schemas.microsoft.com/office/powerpoint/2010/main" val="511103203"/>
+      </p:ext>
+    </p:extLst>
+  </p:cSld>
+  <p:clrMap bg1="lt1" tx1="dk1" bg2="lt2" tx2="dk2" accent1="accent1" accent2="accent2" accent3="accent3" accent4="accent4" accent5="accent5" accent6="accent6" hlink="hlink" folHlink="folHlink"/>
+  <p:notesStyle>
+    <a:lvl1pPr marL="0" algn="l" defTabSz="914400" rtl="0" eaLnBrk="1" latinLnBrk="0" hangingPunct="1">
+      <a:defRPr sz="1200" kern="1200">
+        <a:solidFill>
+          <a:schemeClr val="tx1"/>
+        </a:solidFill>
+        <a:latin typeface="+mn-lt"/>
+        <a:ea typeface="+mn-ea"/>
+        <a:cs typeface="+mn-cs"/>
+      </a:defRPr>
+    </a:lvl1pPr>
+    <a:lvl2pPr marL="457200" algn="l" defTabSz="914400" rtl="0" eaLnBrk="1" latinLnBrk="0" hangingPunct="1">
+      <a:defRPr sz="1200" kern="1200">
+        <a:solidFill>
+          <a:schemeClr val="tx1"/>
+        </a:solidFill>
+        <a:latin typeface="+mn-lt"/>
+        <a:ea typeface="+mn-ea"/>
+        <a:cs typeface="+mn-cs"/>
+      </a:defRPr>
+    </a:lvl2pPr>
+    <a:lvl3pPr marL="914400" algn="l" defTabSz="914400" rtl="0" eaLnBrk="1" latinLnBrk="0" hangingPunct="1">
+      <a:defRPr sz="1200" kern="1200">
+        <a:solidFill>
+          <a:schemeClr val="tx1"/>
+        </a:solidFill>
+        <a:latin typeface="+mn-lt"/>
+        <a:ea typeface="+mn-ea"/>
+        <a:cs typeface="+mn-cs"/>
+      </a:defRPr>
+    </a:lvl3pPr>
+    <a:lvl4pPr marL="1371600" algn="l" defTabSz="914400" rtl="0" eaLnBrk="1" latinLnBrk="0" hangingPunct="1">
+      <a:defRPr sz="1200" kern="1200">
+        <a:solidFill>
+          <a:schemeClr val="tx1"/>
+        </a:solidFill>
+        <a:latin typeface="+mn-lt"/>
+        <a:ea typeface="+mn-ea"/>
+        <a:cs typeface="+mn-cs"/>
+      </a:defRPr>
+    </a:lvl4pPr>
+    <a:lvl5pPr marL="1828800" algn="l" defTabSz="914400" rtl="0" eaLnBrk="1" latinLnBrk="0" hangingPunct="1">
+      <a:defRPr sz="1200" kern="1200">
+        <a:solidFill>
+          <a:schemeClr val="tx1"/>
+        </a:solidFill>
+        <a:latin typeface="+mn-lt"/>
+        <a:ea typeface="+mn-ea"/>
+        <a:cs typeface="+mn-cs"/>
+      </a:defRPr>
+    </a:lvl5pPr>
+    <a:lvl6pPr marL="2286000" algn="l" defTabSz="914400" rtl="0" eaLnBrk="1" latinLnBrk="0" hangingPunct="1">
+      <a:defRPr sz="1200" kern="1200">
+        <a:solidFill>
+          <a:schemeClr val="tx1"/>
+        </a:solidFill>
+        <a:latin typeface="+mn-lt"/>
+        <a:ea typeface="+mn-ea"/>
+        <a:cs typeface="+mn-cs"/>
+      </a:defRPr>
+    </a:lvl6pPr>
+    <a:lvl7pPr marL="2743200" algn="l" defTabSz="914400" rtl="0" eaLnBrk="1" latinLnBrk="0" hangingPunct="1">
+      <a:defRPr sz="1200" kern="1200">
+        <a:solidFill>
+          <a:schemeClr val="tx1"/>
+        </a:solidFill>
+        <a:latin typeface="+mn-lt"/>
+        <a:ea typeface="+mn-ea"/>
+        <a:cs typeface="+mn-cs"/>
+      </a:defRPr>
+    </a:lvl7pPr>
+    <a:lvl8pPr marL="3200400" algn="l" defTabSz="914400" rtl="0" eaLnBrk="1" latinLnBrk="0" hangingPunct="1">
+      <a:defRPr sz="1200" kern="1200">
+        <a:solidFill>
+          <a:schemeClr val="tx1"/>
+        </a:solidFill>
+        <a:latin typeface="+mn-lt"/>
+        <a:ea typeface="+mn-ea"/>
+        <a:cs typeface="+mn-cs"/>
+      </a:defRPr>
+    </a:lvl8pPr>
+    <a:lvl9pPr marL="3657600" algn="l" defTabSz="914400" rtl="0" eaLnBrk="1" latinLnBrk="0" hangingPunct="1">
+      <a:defRPr sz="1200" kern="1200">
+        <a:solidFill>
+          <a:schemeClr val="tx1"/>
+        </a:solidFill>
+        <a:latin typeface="+mn-lt"/>
+        <a:ea typeface="+mn-ea"/>
+        <a:cs typeface="+mn-cs"/>
+      </a:defRPr>
+    </a:lvl9pPr>
+  </p:notesStyle>
+</p:notesMaster>
+</file>
+
+<file path=ppt/notesSlides/notesSlide1.xml><?xml version="1.0" encoding="utf-8"?>
+<p:notes xmlns:a="http://schemas.openxmlformats.org/drawingml/2006/main" xmlns:r="http://schemas.openxmlformats.org/officeDocument/2006/relationships" xmlns:p="http://schemas.openxmlformats.org/presentationml/2006/main">
+  <p:cSld>
+    <p:spTree>
+      <p:nvGrpSpPr>
+        <p:cNvPr id="1" name=""/>
+        <p:cNvGrpSpPr/>
+        <p:nvPr/>
+      </p:nvGrpSpPr>
+      <p:grpSpPr>
+        <a:xfrm>
+          <a:off x="0" y="0"/>
+          <a:ext cx="0" cy="0"/>
+          <a:chOff x="0" y="0"/>
+          <a:chExt cx="0" cy="0"/>
+        </a:xfrm>
+      </p:grpSpPr>
+      <p:sp>
+        <p:nvSpPr>
+          <p:cNvPr id="2" name="Espace réservé de l'image des diapositives 1"/>
+          <p:cNvSpPr>
+            <a:spLocks noGrp="1" noRot="1" noChangeAspect="1"/>
+          </p:cNvSpPr>
+          <p:nvPr>
+            <p:ph type="sldImg"/>
+          </p:nvPr>
+        </p:nvSpPr>
+        <p:spPr/>
+      </p:sp>
+      <p:sp>
+        <p:nvSpPr>
+          <p:cNvPr id="3" name="Espace réservé des notes 2"/>
+          <p:cNvSpPr>
+            <a:spLocks noGrp="1"/>
+          </p:cNvSpPr>
+          <p:nvPr>
+            <p:ph type="body" idx="1"/>
+          </p:nvPr>
+        </p:nvSpPr>
+        <p:spPr/>
+        <p:txBody>
+          <a:bodyPr/>
+          <a:lstStyle/>
+          <a:p>
+            <a:endParaRPr lang="fr-FR" dirty="0"/>
+          </a:p>
+        </p:txBody>
+      </p:sp>
+      <p:sp>
+        <p:nvSpPr>
+          <p:cNvPr id="4" name="Espace réservé du numéro de diapositive 3"/>
+          <p:cNvSpPr>
+            <a:spLocks noGrp="1"/>
+          </p:cNvSpPr>
+          <p:nvPr>
+            <p:ph type="sldNum" sz="quarter" idx="5"/>
+          </p:nvPr>
+        </p:nvSpPr>
+        <p:spPr/>
+        <p:txBody>
+          <a:bodyPr/>
+          <a:lstStyle/>
+          <a:p>
+            <a:fld id="{42646616-886F-4C38-916D-5C3E8C2E94DA}" type="slidenum">
+              <a:rPr lang="fr-FR" smtClean="0"/>
+              <a:t>10</a:t>
+            </a:fld>
+            <a:endParaRPr lang="fr-FR"/>
+          </a:p>
+        </p:txBody>
+      </p:sp>
+    </p:spTree>
+    <p:extLst>
+      <p:ext uri="{BB962C8B-B14F-4D97-AF65-F5344CB8AC3E}">
+        <p14:creationId xmlns:p14="http://schemas.microsoft.com/office/powerpoint/2010/main" val="1763234717"/>
+      </p:ext>
+    </p:extLst>
+  </p:cSld>
+  <p:clrMapOvr>
+    <a:masterClrMapping/>
+  </p:clrMapOvr>
+</p:notes>
+</file>
+
 <file path=ppt/slideLayouts/slideLayout1.xml><?xml version="1.0" encoding="utf-8"?>
 <p:sldLayout xmlns:a="http://schemas.openxmlformats.org/drawingml/2006/main" xmlns:r="http://schemas.openxmlformats.org/officeDocument/2006/relationships" xmlns:p="http://schemas.openxmlformats.org/presentationml/2006/main" type="title" preserve="1">
   <p:cSld name="Diapositive de titre">
@@ -267,7 +704,7 @@
           <a:p>
             <a:fld id="{D667F9FD-7961-499E-B9F5-4118F5126ABB}" type="datetimeFigureOut">
               <a:rPr lang="fr-FR" smtClean="0"/>
-              <a:t>07/02/2026</a:t>
+              <a:t>09/02/2026</a:t>
             </a:fld>
             <a:endParaRPr lang="fr-FR"/>
           </a:p>
@@ -555,7 +992,7 @@
           <a:p>
             <a:fld id="{D667F9FD-7961-499E-B9F5-4118F5126ABB}" type="datetimeFigureOut">
               <a:rPr lang="fr-FR" smtClean="0"/>
-              <a:t>07/02/2026</a:t>
+              <a:t>09/02/2026</a:t>
             </a:fld>
             <a:endParaRPr lang="fr-FR"/>
           </a:p>
@@ -753,7 +1190,7 @@
           <a:p>
             <a:fld id="{D667F9FD-7961-499E-B9F5-4118F5126ABB}" type="datetimeFigureOut">
               <a:rPr lang="fr-FR" smtClean="0"/>
-              <a:t>07/02/2026</a:t>
+              <a:t>09/02/2026</a:t>
             </a:fld>
             <a:endParaRPr lang="fr-FR"/>
           </a:p>
@@ -961,7 +1398,7 @@
           <a:p>
             <a:fld id="{D667F9FD-7961-499E-B9F5-4118F5126ABB}" type="datetimeFigureOut">
               <a:rPr lang="fr-FR" smtClean="0"/>
-              <a:t>07/02/2026</a:t>
+              <a:t>09/02/2026</a:t>
             </a:fld>
             <a:endParaRPr lang="fr-FR"/>
           </a:p>
@@ -1120,7 +1557,7 @@
           <a:p>
             <a:fld id="{D667F9FD-7961-499E-B9F5-4118F5126ABB}" type="datetimeFigureOut">
               <a:rPr lang="fr-FR" smtClean="0"/>
-              <a:t>07/02/2026</a:t>
+              <a:t>09/02/2026</a:t>
             </a:fld>
             <a:endParaRPr lang="fr-FR"/>
           </a:p>
@@ -1473,7 +1910,7 @@
           <a:p>
             <a:fld id="{D667F9FD-7961-499E-B9F5-4118F5126ABB}" type="datetimeFigureOut">
               <a:rPr lang="fr-FR" smtClean="0"/>
-              <a:t>07/02/2026</a:t>
+              <a:t>09/02/2026</a:t>
             </a:fld>
             <a:endParaRPr lang="fr-FR"/>
           </a:p>
@@ -1748,7 +2185,7 @@
           <a:p>
             <a:fld id="{D667F9FD-7961-499E-B9F5-4118F5126ABB}" type="datetimeFigureOut">
               <a:rPr lang="fr-FR" smtClean="0"/>
-              <a:t>07/02/2026</a:t>
+              <a:t>09/02/2026</a:t>
             </a:fld>
             <a:endParaRPr lang="fr-FR"/>
           </a:p>
@@ -2013,7 +2450,7 @@
           <a:p>
             <a:fld id="{D667F9FD-7961-499E-B9F5-4118F5126ABB}" type="datetimeFigureOut">
               <a:rPr lang="fr-FR" smtClean="0"/>
-              <a:t>07/02/2026</a:t>
+              <a:t>09/02/2026</a:t>
             </a:fld>
             <a:endParaRPr lang="fr-FR"/>
           </a:p>
@@ -2425,7 +2862,7 @@
           <a:p>
             <a:fld id="{D667F9FD-7961-499E-B9F5-4118F5126ABB}" type="datetimeFigureOut">
               <a:rPr lang="fr-FR" smtClean="0"/>
-              <a:t>07/02/2026</a:t>
+              <a:t>09/02/2026</a:t>
             </a:fld>
             <a:endParaRPr lang="fr-FR"/>
           </a:p>
@@ -2566,7 +3003,7 @@
           <a:p>
             <a:fld id="{D667F9FD-7961-499E-B9F5-4118F5126ABB}" type="datetimeFigureOut">
               <a:rPr lang="fr-FR" smtClean="0"/>
-              <a:t>07/02/2026</a:t>
+              <a:t>09/02/2026</a:t>
             </a:fld>
             <a:endParaRPr lang="fr-FR"/>
           </a:p>
@@ -2679,7 +3116,7 @@
           <a:p>
             <a:fld id="{D667F9FD-7961-499E-B9F5-4118F5126ABB}" type="datetimeFigureOut">
               <a:rPr lang="fr-FR" smtClean="0"/>
-              <a:t>07/02/2026</a:t>
+              <a:t>09/02/2026</a:t>
             </a:fld>
             <a:endParaRPr lang="fr-FR"/>
           </a:p>
@@ -2990,7 +3427,7 @@
           <a:p>
             <a:fld id="{D667F9FD-7961-499E-B9F5-4118F5126ABB}" type="datetimeFigureOut">
               <a:rPr lang="fr-FR" smtClean="0"/>
-              <a:t>07/02/2026</a:t>
+              <a:t>09/02/2026</a:t>
             </a:fld>
             <a:endParaRPr lang="fr-FR"/>
           </a:p>
@@ -3231,7 +3668,7 @@
           <a:p>
             <a:fld id="{D667F9FD-7961-499E-B9F5-4118F5126ABB}" type="datetimeFigureOut">
               <a:rPr lang="fr-FR" smtClean="0"/>
-              <a:t>07/02/2026</a:t>
+              <a:t>09/02/2026</a:t>
             </a:fld>
             <a:endParaRPr lang="fr-FR"/>
           </a:p>
@@ -4059,6 +4496,553 @@
       <p:bldP spid="2" grpId="0"/>
     </p:bldLst>
   </p:timing>
+</p:sld>
+</file>
+
+<file path=ppt/slides/slide10.xml><?xml version="1.0" encoding="utf-8"?>
+<p:sld xmlns:a="http://schemas.openxmlformats.org/drawingml/2006/main" xmlns:r="http://schemas.openxmlformats.org/officeDocument/2006/relationships" xmlns:p="http://schemas.openxmlformats.org/presentationml/2006/main">
+  <p:cSld>
+    <p:spTree>
+      <p:nvGrpSpPr>
+        <p:cNvPr id="1" name=""/>
+        <p:cNvGrpSpPr/>
+        <p:nvPr/>
+      </p:nvGrpSpPr>
+      <p:grpSpPr>
+        <a:xfrm>
+          <a:off x="0" y="0"/>
+          <a:ext cx="0" cy="0"/>
+          <a:chOff x="0" y="0"/>
+          <a:chExt cx="0" cy="0"/>
+        </a:xfrm>
+      </p:grpSpPr>
+      <p:sp>
+        <p:nvSpPr>
+          <p:cNvPr id="2" name="Titre 1">
+            <a:extLst>
+              <a:ext uri="{FF2B5EF4-FFF2-40B4-BE49-F238E27FC236}">
+                <a16:creationId xmlns:a16="http://schemas.microsoft.com/office/drawing/2014/main" id="{69EF8AAA-966B-631F-E5DF-82F6C0AF40B8}"/>
+              </a:ext>
+            </a:extLst>
+          </p:cNvPr>
+          <p:cNvSpPr>
+            <a:spLocks noGrp="1"/>
+          </p:cNvSpPr>
+          <p:nvPr>
+            <p:ph type="title"/>
+          </p:nvPr>
+        </p:nvSpPr>
+        <p:spPr/>
+        <p:txBody>
+          <a:bodyPr/>
+          <a:lstStyle/>
+          <a:p>
+            <a:r>
+              <a:rPr lang="fr-FR" dirty="0"/>
+              <a:t>	Les variables qui pèsent le plus :</a:t>
+            </a:r>
+          </a:p>
+        </p:txBody>
+      </p:sp>
+      <mc:AlternateContent xmlns:mc="http://schemas.openxmlformats.org/markup-compatibility/2006">
+        <mc:Choice xmlns:a14="http://schemas.microsoft.com/office/drawing/2010/main" Requires="a14">
+          <p:sp>
+            <p:nvSpPr>
+              <p:cNvPr id="3" name="Espace réservé du contenu 2">
+                <a:extLst>
+                  <a:ext uri="{FF2B5EF4-FFF2-40B4-BE49-F238E27FC236}">
+                    <a16:creationId xmlns:a16="http://schemas.microsoft.com/office/drawing/2014/main" id="{8B65C5F2-E7BF-5AF5-A178-9076E4947F63}"/>
+                  </a:ext>
+                </a:extLst>
+              </p:cNvPr>
+              <p:cNvSpPr>
+                <a:spLocks noGrp="1"/>
+              </p:cNvSpPr>
+              <p:nvPr>
+                <p:ph idx="1"/>
+              </p:nvPr>
+            </p:nvSpPr>
+            <p:spPr>
+              <a:xfrm>
+                <a:off x="590243" y="2098674"/>
+                <a:ext cx="10515600" cy="4351338"/>
+              </a:xfrm>
+            </p:spPr>
+            <p:txBody>
+              <a:bodyPr/>
+              <a:lstStyle/>
+              <a:p>
+                <a:pPr latinLnBrk="1"/>
+                <a:r>
+                  <a:rPr lang="fr-FR" sz="1800" b="1" dirty="0"/>
+                  <a:t>Meilleur seuil : </a:t>
+                </a:r>
+                <a:r>
+                  <a:rPr lang="fr-FR" sz="1800" dirty="0"/>
+                  <a:t>1 (Fraude) &gt;=0.930 &gt;0 (Non-fraude)</a:t>
+                </a:r>
+              </a:p>
+              <a:p>
+                <a:pPr latinLnBrk="1"/>
+                <a:r>
+                  <a:rPr lang="fr-FR" sz="1800" b="1" dirty="0" err="1"/>
+                  <a:t>Precision</a:t>
+                </a:r>
+                <a:r>
+                  <a:rPr lang="fr-FR" sz="1800" b="1" dirty="0"/>
+                  <a:t> : </a:t>
+                </a:r>
+                <a:r>
+                  <a:rPr lang="fr-FR" sz="1800" dirty="0"/>
+                  <a:t>58,1% de vraies fraudes soit :  </a:t>
+                </a:r>
+                <a14:m>
+                  <m:oMath xmlns:m="http://schemas.openxmlformats.org/officeDocument/2006/math">
+                    <m:f>
+                      <m:fPr>
+                        <m:ctrlPr>
+                          <a:rPr lang="fr-FR" sz="2000" b="0" i="1" smtClean="0">
+                            <a:latin typeface="Cambria Math" panose="02040503050406030204" pitchFamily="18" charset="0"/>
+                          </a:rPr>
+                        </m:ctrlPr>
+                      </m:fPr>
+                      <m:num>
+                        <m:r>
+                          <a:rPr lang="fr-FR" sz="2000" b="0" i="1" smtClean="0">
+                            <a:latin typeface="Cambria Math" panose="02040503050406030204" pitchFamily="18" charset="0"/>
+                          </a:rPr>
+                          <m:t>𝑇𝑃</m:t>
+                        </m:r>
+                      </m:num>
+                      <m:den>
+                        <m:r>
+                          <a:rPr lang="fr-FR" sz="2000" b="0" i="1" smtClean="0">
+                            <a:latin typeface="Cambria Math" panose="02040503050406030204" pitchFamily="18" charset="0"/>
+                          </a:rPr>
+                          <m:t>𝑇𝑃</m:t>
+                        </m:r>
+                        <m:r>
+                          <a:rPr lang="fr-FR" sz="2000" b="0" i="1" smtClean="0">
+                            <a:latin typeface="Cambria Math" panose="02040503050406030204" pitchFamily="18" charset="0"/>
+                          </a:rPr>
+                          <m:t>+</m:t>
+                        </m:r>
+                        <m:r>
+                          <a:rPr lang="fr-FR" sz="2000" b="0" i="1" smtClean="0">
+                            <a:latin typeface="Cambria Math" panose="02040503050406030204" pitchFamily="18" charset="0"/>
+                          </a:rPr>
+                          <m:t>𝐹𝑃</m:t>
+                        </m:r>
+                      </m:den>
+                    </m:f>
+                  </m:oMath>
+                </a14:m>
+                <a:endParaRPr lang="fr-FR" sz="2000" dirty="0"/>
+              </a:p>
+              <a:p>
+                <a:pPr latinLnBrk="1"/>
+                <a:r>
+                  <a:rPr lang="fr-FR" sz="1800" b="1" dirty="0" err="1"/>
+                  <a:t>Recall</a:t>
+                </a:r>
+                <a:r>
+                  <a:rPr lang="fr-FR" sz="1800" b="1" dirty="0"/>
+                  <a:t> : </a:t>
+                </a:r>
+                <a:r>
+                  <a:rPr lang="fr-FR" sz="1800" dirty="0"/>
+                  <a:t>29,9% de fraudes réelles détectées soit :   </a:t>
+                </a:r>
+                <a14:m>
+                  <m:oMath xmlns:m="http://schemas.openxmlformats.org/officeDocument/2006/math">
+                    <m:f>
+                      <m:fPr>
+                        <m:ctrlPr>
+                          <a:rPr lang="fr-FR" sz="2000" i="1" smtClean="0">
+                            <a:latin typeface="Cambria Math" panose="02040503050406030204" pitchFamily="18" charset="0"/>
+                          </a:rPr>
+                        </m:ctrlPr>
+                      </m:fPr>
+                      <m:num>
+                        <m:r>
+                          <a:rPr lang="fr-FR" sz="2000" i="1">
+                            <a:latin typeface="Cambria Math" panose="02040503050406030204" pitchFamily="18" charset="0"/>
+                          </a:rPr>
+                          <m:t>𝑇𝑃</m:t>
+                        </m:r>
+                      </m:num>
+                      <m:den>
+                        <m:r>
+                          <a:rPr lang="fr-FR" sz="2000" i="1">
+                            <a:latin typeface="Cambria Math" panose="02040503050406030204" pitchFamily="18" charset="0"/>
+                          </a:rPr>
+                          <m:t>𝑇𝑃</m:t>
+                        </m:r>
+                        <m:r>
+                          <a:rPr lang="fr-FR" sz="2000" i="1">
+                            <a:latin typeface="Cambria Math" panose="02040503050406030204" pitchFamily="18" charset="0"/>
+                          </a:rPr>
+                          <m:t>+</m:t>
+                        </m:r>
+                        <m:r>
+                          <a:rPr lang="fr-FR" sz="2000" b="0" i="1" smtClean="0">
+                            <a:latin typeface="Cambria Math" panose="02040503050406030204" pitchFamily="18" charset="0"/>
+                          </a:rPr>
+                          <m:t>𝐹𝑁</m:t>
+                        </m:r>
+                      </m:den>
+                    </m:f>
+                  </m:oMath>
+                </a14:m>
+                <a:endParaRPr lang="fr-FR" sz="2000" dirty="0"/>
+              </a:p>
+              <a:p>
+                <a:endParaRPr lang="fr-FR" dirty="0"/>
+              </a:p>
+            </p:txBody>
+          </p:sp>
+        </mc:Choice>
+        <mc:Fallback>
+          <p:sp>
+            <p:nvSpPr>
+              <p:cNvPr id="3" name="Espace réservé du contenu 2">
+                <a:extLst>
+                  <a:ext uri="{FF2B5EF4-FFF2-40B4-BE49-F238E27FC236}">
+                    <a16:creationId xmlns:a16="http://schemas.microsoft.com/office/drawing/2014/main" id="{8B65C5F2-E7BF-5AF5-A178-9076E4947F63}"/>
+                  </a:ext>
+                </a:extLst>
+              </p:cNvPr>
+              <p:cNvSpPr>
+                <a:spLocks noGrp="1" noRot="1" noChangeAspect="1" noMove="1" noResize="1" noEditPoints="1" noAdjustHandles="1" noChangeArrowheads="1" noChangeShapeType="1" noTextEdit="1"/>
+              </p:cNvSpPr>
+              <p:nvPr>
+                <p:ph idx="1"/>
+              </p:nvPr>
+            </p:nvSpPr>
+            <p:spPr>
+              <a:xfrm>
+                <a:off x="590243" y="2098674"/>
+                <a:ext cx="10515600" cy="4351338"/>
+              </a:xfrm>
+              <a:blipFill>
+                <a:blip r:embed="rId3"/>
+                <a:stretch>
+                  <a:fillRect l="-406" t="-1261"/>
+                </a:stretch>
+              </a:blipFill>
+            </p:spPr>
+            <p:txBody>
+              <a:bodyPr/>
+              <a:lstStyle/>
+              <a:p>
+                <a:r>
+                  <a:rPr lang="fr-FR">
+                    <a:noFill/>
+                  </a:rPr>
+                  <a:t> </a:t>
+                </a:r>
+              </a:p>
+            </p:txBody>
+          </p:sp>
+        </mc:Fallback>
+      </mc:AlternateContent>
+      <p:pic>
+        <p:nvPicPr>
+          <p:cNvPr id="6" name="Image 5" descr="Une image contenant texte, capture d’écran, ligne, diagramme&#10;&#10;Le contenu généré par l’IA peut être incorrect.">
+            <a:extLst>
+              <a:ext uri="{FF2B5EF4-FFF2-40B4-BE49-F238E27FC236}">
+                <a16:creationId xmlns:a16="http://schemas.microsoft.com/office/drawing/2014/main" id="{0AABC4E0-5D71-7082-5D00-068184E604AE}"/>
+              </a:ext>
+            </a:extLst>
+          </p:cNvPr>
+          <p:cNvPicPr>
+            <a:picLocks noChangeAspect="1"/>
+          </p:cNvPicPr>
+          <p:nvPr/>
+        </p:nvPicPr>
+        <p:blipFill>
+          <a:blip r:embed="rId4"/>
+          <a:stretch>
+            <a:fillRect/>
+          </a:stretch>
+        </p:blipFill>
+        <p:spPr>
+          <a:xfrm>
+            <a:off x="7351683" y="2628206"/>
+            <a:ext cx="3754160" cy="4054274"/>
+          </a:xfrm>
+          <a:prstGeom prst="rect">
+            <a:avLst/>
+          </a:prstGeom>
+        </p:spPr>
+      </p:pic>
+      <p:cxnSp>
+        <p:nvCxnSpPr>
+          <p:cNvPr id="8" name="Connecteur droit avec flèche 7">
+            <a:extLst>
+              <a:ext uri="{FF2B5EF4-FFF2-40B4-BE49-F238E27FC236}">
+                <a16:creationId xmlns:a16="http://schemas.microsoft.com/office/drawing/2014/main" id="{1AA93DB6-A3CF-792B-2DDC-7B8D79516300}"/>
+              </a:ext>
+            </a:extLst>
+          </p:cNvPr>
+          <p:cNvCxnSpPr>
+            <a:cxnSpLocks/>
+          </p:cNvCxnSpPr>
+          <p:nvPr/>
+        </p:nvCxnSpPr>
+        <p:spPr>
+          <a:xfrm>
+            <a:off x="7737988" y="2396613"/>
+            <a:ext cx="2880851" cy="0"/>
+          </a:xfrm>
+          <a:prstGeom prst="straightConnector1">
+            <a:avLst/>
+          </a:prstGeom>
+          <a:ln>
+            <a:tailEnd type="triangle"/>
+          </a:ln>
+        </p:spPr>
+        <p:style>
+          <a:lnRef idx="2">
+            <a:schemeClr val="dk1"/>
+          </a:lnRef>
+          <a:fillRef idx="0">
+            <a:schemeClr val="dk1"/>
+          </a:fillRef>
+          <a:effectRef idx="1">
+            <a:schemeClr val="dk1"/>
+          </a:effectRef>
+          <a:fontRef idx="minor">
+            <a:schemeClr val="tx1"/>
+          </a:fontRef>
+        </p:style>
+      </p:cxnSp>
+      <p:sp>
+        <p:nvSpPr>
+          <p:cNvPr id="9" name="ZoneTexte 8">
+            <a:extLst>
+              <a:ext uri="{FF2B5EF4-FFF2-40B4-BE49-F238E27FC236}">
+                <a16:creationId xmlns:a16="http://schemas.microsoft.com/office/drawing/2014/main" id="{FE527775-9F54-A088-26F4-A24947DD6457}"/>
+              </a:ext>
+            </a:extLst>
+          </p:cNvPr>
+          <p:cNvSpPr txBox="1"/>
+          <p:nvPr/>
+        </p:nvSpPr>
+        <p:spPr>
+          <a:xfrm>
+            <a:off x="8410678" y="2220221"/>
+            <a:ext cx="1948425" cy="338554"/>
+          </a:xfrm>
+          <a:prstGeom prst="rect">
+            <a:avLst/>
+          </a:prstGeom>
+          <a:solidFill>
+            <a:srgbClr val="F2F2F2"/>
+          </a:solidFill>
+        </p:spPr>
+        <p:txBody>
+          <a:bodyPr wrap="square" rtlCol="0">
+            <a:spAutoFit/>
+          </a:bodyPr>
+          <a:lstStyle/>
+          <a:p>
+            <a:r>
+              <a:rPr lang="fr-FR" sz="1600" dirty="0"/>
+              <a:t>Risque de fraude</a:t>
+            </a:r>
+          </a:p>
+        </p:txBody>
+      </p:sp>
+      <p:cxnSp>
+        <p:nvCxnSpPr>
+          <p:cNvPr id="12" name="Connecteur droit avec flèche 11">
+            <a:extLst>
+              <a:ext uri="{FF2B5EF4-FFF2-40B4-BE49-F238E27FC236}">
+                <a16:creationId xmlns:a16="http://schemas.microsoft.com/office/drawing/2014/main" id="{9505125D-F6CD-157B-D072-DA9AEE1C8B9E}"/>
+              </a:ext>
+            </a:extLst>
+          </p:cNvPr>
+          <p:cNvCxnSpPr>
+            <a:cxnSpLocks/>
+          </p:cNvCxnSpPr>
+          <p:nvPr/>
+        </p:nvCxnSpPr>
+        <p:spPr>
+          <a:xfrm flipV="1">
+            <a:off x="11468100" y="2705100"/>
+            <a:ext cx="0" cy="3550920"/>
+          </a:xfrm>
+          <a:prstGeom prst="straightConnector1">
+            <a:avLst/>
+          </a:prstGeom>
+          <a:ln>
+            <a:tailEnd type="triangle"/>
+          </a:ln>
+        </p:spPr>
+        <p:style>
+          <a:lnRef idx="2">
+            <a:schemeClr val="dk1"/>
+          </a:lnRef>
+          <a:fillRef idx="0">
+            <a:schemeClr val="dk1"/>
+          </a:fillRef>
+          <a:effectRef idx="1">
+            <a:schemeClr val="dk1"/>
+          </a:effectRef>
+          <a:fontRef idx="minor">
+            <a:schemeClr val="tx1"/>
+          </a:fontRef>
+        </p:style>
+      </p:cxnSp>
+      <p:sp>
+        <p:nvSpPr>
+          <p:cNvPr id="15" name="ZoneTexte 14">
+            <a:extLst>
+              <a:ext uri="{FF2B5EF4-FFF2-40B4-BE49-F238E27FC236}">
+                <a16:creationId xmlns:a16="http://schemas.microsoft.com/office/drawing/2014/main" id="{B3492C23-10BF-0827-05E8-3A99BBA55090}"/>
+              </a:ext>
+            </a:extLst>
+          </p:cNvPr>
+          <p:cNvSpPr txBox="1"/>
+          <p:nvPr/>
+        </p:nvSpPr>
+        <p:spPr>
+          <a:xfrm rot="5400000">
+            <a:off x="10487435" y="4231902"/>
+            <a:ext cx="1948425" cy="338554"/>
+          </a:xfrm>
+          <a:prstGeom prst="rect">
+            <a:avLst/>
+          </a:prstGeom>
+          <a:solidFill>
+            <a:srgbClr val="F2F2F2"/>
+          </a:solidFill>
+        </p:spPr>
+        <p:txBody>
+          <a:bodyPr wrap="square" rtlCol="0">
+            <a:spAutoFit/>
+          </a:bodyPr>
+          <a:lstStyle/>
+          <a:p>
+            <a:r>
+              <a:rPr lang="fr-FR" sz="1600" dirty="0"/>
+              <a:t>Valeur de la variable</a:t>
+            </a:r>
+          </a:p>
+        </p:txBody>
+      </p:sp>
+      <p:sp>
+        <p:nvSpPr>
+          <p:cNvPr id="16" name="Accolade fermante 15">
+            <a:extLst>
+              <a:ext uri="{FF2B5EF4-FFF2-40B4-BE49-F238E27FC236}">
+                <a16:creationId xmlns:a16="http://schemas.microsoft.com/office/drawing/2014/main" id="{F5A2C58C-E6D6-0218-D14A-D79C65EE8C1D}"/>
+              </a:ext>
+            </a:extLst>
+          </p:cNvPr>
+          <p:cNvSpPr/>
+          <p:nvPr/>
+        </p:nvSpPr>
+        <p:spPr>
+          <a:xfrm rot="10800000">
+            <a:off x="6629770" y="2304891"/>
+            <a:ext cx="628650" cy="4351338"/>
+          </a:xfrm>
+          <a:prstGeom prst="rightBrace">
+            <a:avLst>
+              <a:gd name="adj1" fmla="val 8333"/>
+              <a:gd name="adj2" fmla="val 31225"/>
+            </a:avLst>
+          </a:prstGeom>
+        </p:spPr>
+        <p:style>
+          <a:lnRef idx="2">
+            <a:schemeClr val="dk1"/>
+          </a:lnRef>
+          <a:fillRef idx="0">
+            <a:schemeClr val="dk1"/>
+          </a:fillRef>
+          <a:effectRef idx="1">
+            <a:schemeClr val="dk1"/>
+          </a:effectRef>
+          <a:fontRef idx="minor">
+            <a:schemeClr val="tx1"/>
+          </a:fontRef>
+        </p:style>
+        <p:txBody>
+          <a:bodyPr rtlCol="0" anchor="ctr"/>
+          <a:lstStyle/>
+          <a:p>
+            <a:pPr algn="ctr"/>
+            <a:endParaRPr lang="fr-FR" dirty="0"/>
+          </a:p>
+        </p:txBody>
+      </p:sp>
+      <p:sp>
+        <p:nvSpPr>
+          <p:cNvPr id="17" name="Rectangle : coins arrondis 16">
+            <a:extLst>
+              <a:ext uri="{FF2B5EF4-FFF2-40B4-BE49-F238E27FC236}">
+                <a16:creationId xmlns:a16="http://schemas.microsoft.com/office/drawing/2014/main" id="{EBC348E1-B6B5-10F2-B3A8-009D6D3E934B}"/>
+              </a:ext>
+            </a:extLst>
+          </p:cNvPr>
+          <p:cNvSpPr/>
+          <p:nvPr/>
+        </p:nvSpPr>
+        <p:spPr>
+          <a:xfrm>
+            <a:off x="1432297" y="4810866"/>
+            <a:ext cx="5034648" cy="849651"/>
+          </a:xfrm>
+          <a:prstGeom prst="roundRect">
+            <a:avLst/>
+          </a:prstGeom>
+          <a:solidFill>
+            <a:srgbClr val="262626"/>
+          </a:solidFill>
+        </p:spPr>
+        <p:style>
+          <a:lnRef idx="2">
+            <a:schemeClr val="accent1">
+              <a:shade val="15000"/>
+            </a:schemeClr>
+          </a:lnRef>
+          <a:fillRef idx="1">
+            <a:schemeClr val="accent1"/>
+          </a:fillRef>
+          <a:effectRef idx="0">
+            <a:schemeClr val="accent1"/>
+          </a:effectRef>
+          <a:fontRef idx="minor">
+            <a:schemeClr val="lt1"/>
+          </a:fontRef>
+        </p:style>
+        <p:txBody>
+          <a:bodyPr wrap="square" rtlCol="0" anchor="ctr">
+            <a:noAutofit/>
+          </a:bodyPr>
+          <a:lstStyle/>
+          <a:p>
+            <a:pPr latinLnBrk="1"/>
+            <a:r>
+              <a:rPr lang="fr-FR" dirty="0"/>
+              <a:t>Graphique SHAP montre l’importance et le sens d’influence de chaque variable sur la prédiction de fraude.</a:t>
+            </a:r>
+          </a:p>
+        </p:txBody>
+      </p:sp>
+    </p:spTree>
+    <p:extLst>
+      <p:ext uri="{BB962C8B-B14F-4D97-AF65-F5344CB8AC3E}">
+        <p14:creationId xmlns:p14="http://schemas.microsoft.com/office/powerpoint/2010/main" val="2729730156"/>
+      </p:ext>
+    </p:extLst>
+  </p:cSld>
+  <p:clrMapOvr>
+    <a:masterClrMapping/>
+  </p:clrMapOvr>
 </p:sld>
 </file>
 
@@ -8343,7 +9327,7 @@
         <p:spPr>
           <a:xfrm>
             <a:off x="3173356" y="3716442"/>
-            <a:ext cx="2821861" cy="1754326"/>
+            <a:ext cx="2821861" cy="2031325"/>
           </a:xfrm>
           <a:prstGeom prst="rect">
             <a:avLst/>
@@ -8373,6 +9357,16 @@
             <a:r>
               <a:rPr lang="fr-FR" dirty="0"/>
               <a:t>Prix max</a:t>
+            </a:r>
+          </a:p>
+          <a:p>
+            <a:pPr marL="285750" indent="-285750">
+              <a:buFont typeface="Arial" panose="020B0604020202020204" pitchFamily="34" charset="0"/>
+              <a:buChar char="•"/>
+            </a:pPr>
+            <a:r>
+              <a:rPr lang="fr-FR" dirty="0"/>
+              <a:t>Prix min</a:t>
             </a:r>
           </a:p>
           <a:p>
@@ -8680,7 +9674,7 @@
         <p:spPr>
           <a:xfrm>
             <a:off x="9013718" y="3768706"/>
-            <a:ext cx="2821861" cy="1200329"/>
+            <a:ext cx="2821861" cy="1754326"/>
           </a:xfrm>
           <a:prstGeom prst="rect">
             <a:avLst/>
@@ -8720,6 +9714,16 @@
             <a:r>
               <a:rPr lang="fr-FR" dirty="0"/>
               <a:t>Nbre de modèle unique</a:t>
+            </a:r>
+          </a:p>
+          <a:p>
+            <a:pPr marL="285750" indent="-285750">
+              <a:buFont typeface="Arial" panose="020B0604020202020204" pitchFamily="34" charset="0"/>
+              <a:buChar char="•"/>
+            </a:pPr>
+            <a:r>
+              <a:rPr lang="fr-FR" dirty="0"/>
+              <a:t>Dominance d’une marque</a:t>
             </a:r>
           </a:p>
           <a:p>
@@ -12531,7 +13535,7 @@
           <a:p>
             <a:r>
               <a:rPr lang="fr-FR" sz="2000" dirty="0"/>
-              <a:t>X = 15  x ‘’Feature engineering’’</a:t>
+              <a:t>X = 17  x ‘’Feature engineering’’</a:t>
             </a:r>
           </a:p>
           <a:p>
@@ -15878,36 +16882,6 @@
           </a:p>
         </p:txBody>
       </p:sp>
-      <p:pic>
-        <p:nvPicPr>
-          <p:cNvPr id="6" name="Image 5" descr="Une image contenant texte, ligne, diagramme, Tracé&#10;&#10;Le contenu généré par l’IA peut être incorrect.">
-            <a:extLst>
-              <a:ext uri="{FF2B5EF4-FFF2-40B4-BE49-F238E27FC236}">
-                <a16:creationId xmlns:a16="http://schemas.microsoft.com/office/drawing/2014/main" id="{4FBCA1AD-8D35-B98C-07BB-204A5423CDF6}"/>
-              </a:ext>
-            </a:extLst>
-          </p:cNvPr>
-          <p:cNvPicPr>
-            <a:picLocks noChangeAspect="1"/>
-          </p:cNvPicPr>
-          <p:nvPr/>
-        </p:nvPicPr>
-        <p:blipFill>
-          <a:blip r:embed="rId2"/>
-          <a:stretch>
-            <a:fillRect/>
-          </a:stretch>
-        </p:blipFill>
-        <p:spPr>
-          <a:xfrm>
-            <a:off x="268508" y="2165062"/>
-            <a:ext cx="5827492" cy="4354954"/>
-          </a:xfrm>
-          <a:prstGeom prst="rect">
-            <a:avLst/>
-          </a:prstGeom>
-        </p:spPr>
-      </p:pic>
       <p:graphicFrame>
         <p:nvGraphicFramePr>
           <p:cNvPr id="7" name="Tableau 6">
@@ -15923,7 +16897,7 @@
           <p:nvPr>
             <p:extLst>
               <p:ext uri="{D42A27DB-BD31-4B8C-83A1-F6EECF244321}">
-                <p14:modId xmlns:p14="http://schemas.microsoft.com/office/powerpoint/2010/main" val="3296082137"/>
+                <p14:modId xmlns:p14="http://schemas.microsoft.com/office/powerpoint/2010/main" val="829249284"/>
               </p:ext>
             </p:extLst>
           </p:nvPr>
@@ -16066,7 +17040,7 @@
                           <a:ea typeface="+mn-ea"/>
                           <a:cs typeface="+mn-cs"/>
                         </a:rPr>
-                        <a:t> 1: 0.1690</a:t>
+                        <a:t> 1: 0.1700</a:t>
                       </a:r>
                     </a:p>
                   </a:txBody>
@@ -16152,7 +17126,7 @@
                           <a:ea typeface="+mn-ea"/>
                           <a:cs typeface="+mn-cs"/>
                         </a:rPr>
-                        <a:t> 2: 0.1347</a:t>
+                        <a:t> 2: 0.1473</a:t>
                       </a:r>
                     </a:p>
                   </a:txBody>
@@ -16271,7 +17245,7 @@
                           <a:ea typeface="+mn-ea"/>
                           <a:cs typeface="+mn-cs"/>
                         </a:rPr>
-                        <a:t> 3: 0.1550</a:t>
+                        <a:t> 3: 0.1630</a:t>
                       </a:r>
                     </a:p>
                   </a:txBody>
@@ -16390,7 +17364,7 @@
                           <a:ea typeface="+mn-ea"/>
                           <a:cs typeface="+mn-cs"/>
                         </a:rPr>
-                        <a:t> 4: 0.1683</a:t>
+                        <a:t> 4: 0.1753</a:t>
                       </a:r>
                     </a:p>
                   </a:txBody>
@@ -16509,7 +17483,7 @@
                           <a:ea typeface="+mn-ea"/>
                           <a:cs typeface="+mn-cs"/>
                         </a:rPr>
-                        <a:t> 5: 0.1349</a:t>
+                        <a:t> 5: 0.1342</a:t>
                       </a:r>
                     </a:p>
                   </a:txBody>
@@ -16572,14 +17546,14 @@
             <a:pPr latinLnBrk="1"/>
             <a:r>
               <a:rPr lang="fr-FR" dirty="0"/>
-              <a:t>Moyenne : 0.152</a:t>
+              <a:t>Moyenne : 0.1579</a:t>
             </a:r>
           </a:p>
           <a:p>
             <a:pPr latinLnBrk="1"/>
             <a:r>
               <a:rPr lang="fr-FR" dirty="0"/>
-              <a:t>Écart-type : 0.0152</a:t>
+              <a:t>Écart-type : 0.0151</a:t>
             </a:r>
           </a:p>
         </p:txBody>
@@ -16919,6 +17893,36 @@
           </a:p>
         </p:txBody>
       </p:sp>
+      <p:pic>
+        <p:nvPicPr>
+          <p:cNvPr id="10" name="Image 9" descr="Une image contenant texte, ligne, Tracé, diagramme&#10;&#10;Le contenu généré par l’IA peut être incorrect.">
+            <a:extLst>
+              <a:ext uri="{FF2B5EF4-FFF2-40B4-BE49-F238E27FC236}">
+                <a16:creationId xmlns:a16="http://schemas.microsoft.com/office/drawing/2014/main" id="{F55A7CBC-2957-5AE1-9E78-D60322F8586A}"/>
+              </a:ext>
+            </a:extLst>
+          </p:cNvPr>
+          <p:cNvPicPr>
+            <a:picLocks noChangeAspect="1"/>
+          </p:cNvPicPr>
+          <p:nvPr/>
+        </p:nvPicPr>
+        <p:blipFill>
+          <a:blip r:embed="rId2"/>
+          <a:stretch>
+            <a:fillRect/>
+          </a:stretch>
+        </p:blipFill>
+        <p:spPr>
+          <a:xfrm>
+            <a:off x="886752" y="2097747"/>
+            <a:ext cx="5209248" cy="4064276"/>
+          </a:xfrm>
+          <a:prstGeom prst="rect">
+            <a:avLst/>
+          </a:prstGeom>
+        </p:spPr>
+      </p:pic>
     </p:spTree>
     <p:extLst>
       <p:ext uri="{BB962C8B-B14F-4D97-AF65-F5344CB8AC3E}">
@@ -17245,4 +18249,319 @@
     </a:ext>
   </a:extLst>
 </a:theme>
+</file>
+
+<file path=ppt/theme/theme2.xml><?xml version="1.0" encoding="utf-8"?>
+<a:theme xmlns:a="http://schemas.openxmlformats.org/drawingml/2006/main" name="Thème Office">
+  <a:themeElements>
+    <a:clrScheme name="Office">
+      <a:dk1>
+        <a:sysClr val="windowText" lastClr="000000"/>
+      </a:dk1>
+      <a:lt1>
+        <a:sysClr val="window" lastClr="FFFFFF"/>
+      </a:lt1>
+      <a:dk2>
+        <a:srgbClr val="0E2841"/>
+      </a:dk2>
+      <a:lt2>
+        <a:srgbClr val="E8E8E8"/>
+      </a:lt2>
+      <a:accent1>
+        <a:srgbClr val="156082"/>
+      </a:accent1>
+      <a:accent2>
+        <a:srgbClr val="E97132"/>
+      </a:accent2>
+      <a:accent3>
+        <a:srgbClr val="196B24"/>
+      </a:accent3>
+      <a:accent4>
+        <a:srgbClr val="0F9ED5"/>
+      </a:accent4>
+      <a:accent5>
+        <a:srgbClr val="A02B93"/>
+      </a:accent5>
+      <a:accent6>
+        <a:srgbClr val="4EA72E"/>
+      </a:accent6>
+      <a:hlink>
+        <a:srgbClr val="467886"/>
+      </a:hlink>
+      <a:folHlink>
+        <a:srgbClr val="96607D"/>
+      </a:folHlink>
+    </a:clrScheme>
+    <a:fontScheme name="Office">
+      <a:majorFont>
+        <a:latin typeface="Aptos Display" panose="02110004020202020204"/>
+        <a:ea typeface=""/>
+        <a:cs typeface=""/>
+        <a:font script="Jpan" typeface="游ゴシック Light"/>
+        <a:font script="Hang" typeface="맑은 고딕"/>
+        <a:font script="Hans" typeface="等线 Light"/>
+        <a:font script="Hant" typeface="新細明體"/>
+        <a:font script="Arab" typeface="Times New Roman"/>
+        <a:font script="Hebr" typeface="Times New Roman"/>
+        <a:font script="Thai" typeface="Angsana New"/>
+        <a:font script="Ethi" typeface="Nyala"/>
+        <a:font script="Beng" typeface="Vrinda"/>
+        <a:font script="Gujr" typeface="Shruti"/>
+        <a:font script="Khmr" typeface="MoolBoran"/>
+        <a:font script="Knda" typeface="Tunga"/>
+        <a:font script="Guru" typeface="Raavi"/>
+        <a:font script="Cans" typeface="Euphemia"/>
+        <a:font script="Cher" typeface="Plantagenet Cherokee"/>
+        <a:font script="Yiii" typeface="Microsoft Yi Baiti"/>
+        <a:font script="Tibt" typeface="Microsoft Himalaya"/>
+        <a:font script="Thaa" typeface="MV Boli"/>
+        <a:font script="Deva" typeface="Mangal"/>
+        <a:font script="Telu" typeface="Gautami"/>
+        <a:font script="Taml" typeface="Latha"/>
+        <a:font script="Syrc" typeface="Estrangelo Edessa"/>
+        <a:font script="Orya" typeface="Kalinga"/>
+        <a:font script="Mlym" typeface="Kartika"/>
+        <a:font script="Laoo" typeface="DokChampa"/>
+        <a:font script="Sinh" typeface="Iskoola Pota"/>
+        <a:font script="Mong" typeface="Mongolian Baiti"/>
+        <a:font script="Viet" typeface="Times New Roman"/>
+        <a:font script="Uigh" typeface="Microsoft Uighur"/>
+        <a:font script="Geor" typeface="Sylfaen"/>
+        <a:font script="Armn" typeface="Arial"/>
+        <a:font script="Bugi" typeface="Leelawadee UI"/>
+        <a:font script="Bopo" typeface="Microsoft JhengHei"/>
+        <a:font script="Java" typeface="Javanese Text"/>
+        <a:font script="Lisu" typeface="Segoe UI"/>
+        <a:font script="Mymr" typeface="Myanmar Text"/>
+        <a:font script="Nkoo" typeface="Ebrima"/>
+        <a:font script="Olck" typeface="Nirmala UI"/>
+        <a:font script="Osma" typeface="Ebrima"/>
+        <a:font script="Phag" typeface="Phagspa"/>
+        <a:font script="Syrn" typeface="Estrangelo Edessa"/>
+        <a:font script="Syrj" typeface="Estrangelo Edessa"/>
+        <a:font script="Syre" typeface="Estrangelo Edessa"/>
+        <a:font script="Sora" typeface="Nirmala UI"/>
+        <a:font script="Tale" typeface="Microsoft Tai Le"/>
+        <a:font script="Talu" typeface="Microsoft New Tai Lue"/>
+        <a:font script="Tfng" typeface="Ebrima"/>
+      </a:majorFont>
+      <a:minorFont>
+        <a:latin typeface="Aptos" panose="02110004020202020204"/>
+        <a:ea typeface=""/>
+        <a:cs typeface=""/>
+        <a:font script="Jpan" typeface="游ゴシック"/>
+        <a:font script="Hang" typeface="맑은 고딕"/>
+        <a:font script="Hans" typeface="等线"/>
+        <a:font script="Hant" typeface="新細明體"/>
+        <a:font script="Arab" typeface="Arial"/>
+        <a:font script="Hebr" typeface="Arial"/>
+        <a:font script="Thai" typeface="Cordia New"/>
+        <a:font script="Ethi" typeface="Nyala"/>
+        <a:font script="Beng" typeface="Vrinda"/>
+        <a:font script="Gujr" typeface="Shruti"/>
+        <a:font script="Khmr" typeface="DaunPenh"/>
+        <a:font script="Knda" typeface="Tunga"/>
+        <a:font script="Guru" typeface="Raavi"/>
+        <a:font script="Cans" typeface="Euphemia"/>
+        <a:font script="Cher" typeface="Plantagenet Cherokee"/>
+        <a:font script="Yiii" typeface="Microsoft Yi Baiti"/>
+        <a:font script="Tibt" typeface="Microsoft Himalaya"/>
+        <a:font script="Thaa" typeface="MV Boli"/>
+        <a:font script="Deva" typeface="Mangal"/>
+        <a:font script="Telu" typeface="Gautami"/>
+        <a:font script="Taml" typeface="Latha"/>
+        <a:font script="Syrc" typeface="Estrangelo Edessa"/>
+        <a:font script="Orya" typeface="Kalinga"/>
+        <a:font script="Mlym" typeface="Kartika"/>
+        <a:font script="Laoo" typeface="DokChampa"/>
+        <a:font script="Sinh" typeface="Iskoola Pota"/>
+        <a:font script="Mong" typeface="Mongolian Baiti"/>
+        <a:font script="Viet" typeface="Arial"/>
+        <a:font script="Uigh" typeface="Microsoft Uighur"/>
+        <a:font script="Geor" typeface="Sylfaen"/>
+        <a:font script="Armn" typeface="Arial"/>
+        <a:font script="Bugi" typeface="Leelawadee UI"/>
+        <a:font script="Bopo" typeface="Microsoft JhengHei"/>
+        <a:font script="Java" typeface="Javanese Text"/>
+        <a:font script="Lisu" typeface="Segoe UI"/>
+        <a:font script="Mymr" typeface="Myanmar Text"/>
+        <a:font script="Nkoo" typeface="Ebrima"/>
+        <a:font script="Olck" typeface="Nirmala UI"/>
+        <a:font script="Osma" typeface="Ebrima"/>
+        <a:font script="Phag" typeface="Phagspa"/>
+        <a:font script="Syrn" typeface="Estrangelo Edessa"/>
+        <a:font script="Syrj" typeface="Estrangelo Edessa"/>
+        <a:font script="Syre" typeface="Estrangelo Edessa"/>
+        <a:font script="Sora" typeface="Nirmala UI"/>
+        <a:font script="Tale" typeface="Microsoft Tai Le"/>
+        <a:font script="Talu" typeface="Microsoft New Tai Lue"/>
+        <a:font script="Tfng" typeface="Ebrima"/>
+      </a:minorFont>
+    </a:fontScheme>
+    <a:fmtScheme name="Office">
+      <a:fillStyleLst>
+        <a:solidFill>
+          <a:schemeClr val="phClr"/>
+        </a:solidFill>
+        <a:gradFill rotWithShape="1">
+          <a:gsLst>
+            <a:gs pos="0">
+              <a:schemeClr val="phClr">
+                <a:lumMod val="110000"/>
+                <a:satMod val="105000"/>
+                <a:tint val="67000"/>
+              </a:schemeClr>
+            </a:gs>
+            <a:gs pos="50000">
+              <a:schemeClr val="phClr">
+                <a:lumMod val="105000"/>
+                <a:satMod val="103000"/>
+                <a:tint val="73000"/>
+              </a:schemeClr>
+            </a:gs>
+            <a:gs pos="100000">
+              <a:schemeClr val="phClr">
+                <a:lumMod val="105000"/>
+                <a:satMod val="109000"/>
+                <a:tint val="81000"/>
+              </a:schemeClr>
+            </a:gs>
+          </a:gsLst>
+          <a:lin ang="5400000" scaled="0"/>
+        </a:gradFill>
+        <a:gradFill rotWithShape="1">
+          <a:gsLst>
+            <a:gs pos="0">
+              <a:schemeClr val="phClr">
+                <a:satMod val="103000"/>
+                <a:lumMod val="102000"/>
+                <a:tint val="94000"/>
+              </a:schemeClr>
+            </a:gs>
+            <a:gs pos="50000">
+              <a:schemeClr val="phClr">
+                <a:satMod val="110000"/>
+                <a:lumMod val="100000"/>
+                <a:shade val="100000"/>
+              </a:schemeClr>
+            </a:gs>
+            <a:gs pos="100000">
+              <a:schemeClr val="phClr">
+                <a:lumMod val="99000"/>
+                <a:satMod val="120000"/>
+                <a:shade val="78000"/>
+              </a:schemeClr>
+            </a:gs>
+          </a:gsLst>
+          <a:lin ang="5400000" scaled="0"/>
+        </a:gradFill>
+      </a:fillStyleLst>
+      <a:lnStyleLst>
+        <a:ln w="12700" cap="flat" cmpd="sng" algn="ctr">
+          <a:solidFill>
+            <a:schemeClr val="phClr"/>
+          </a:solidFill>
+          <a:prstDash val="solid"/>
+          <a:miter lim="800000"/>
+        </a:ln>
+        <a:ln w="19050" cap="flat" cmpd="sng" algn="ctr">
+          <a:solidFill>
+            <a:schemeClr val="phClr"/>
+          </a:solidFill>
+          <a:prstDash val="solid"/>
+          <a:miter lim="800000"/>
+        </a:ln>
+        <a:ln w="25400" cap="flat" cmpd="sng" algn="ctr">
+          <a:solidFill>
+            <a:schemeClr val="phClr"/>
+          </a:solidFill>
+          <a:prstDash val="solid"/>
+          <a:miter lim="800000"/>
+        </a:ln>
+      </a:lnStyleLst>
+      <a:effectStyleLst>
+        <a:effectStyle>
+          <a:effectLst/>
+        </a:effectStyle>
+        <a:effectStyle>
+          <a:effectLst/>
+        </a:effectStyle>
+        <a:effectStyle>
+          <a:effectLst>
+            <a:outerShdw blurRad="57150" dist="19050" dir="5400000" algn="ctr" rotWithShape="0">
+              <a:srgbClr val="000000">
+                <a:alpha val="63000"/>
+              </a:srgbClr>
+            </a:outerShdw>
+          </a:effectLst>
+        </a:effectStyle>
+      </a:effectStyleLst>
+      <a:bgFillStyleLst>
+        <a:solidFill>
+          <a:schemeClr val="phClr"/>
+        </a:solidFill>
+        <a:solidFill>
+          <a:schemeClr val="phClr">
+            <a:tint val="95000"/>
+            <a:satMod val="170000"/>
+          </a:schemeClr>
+        </a:solidFill>
+        <a:gradFill rotWithShape="1">
+          <a:gsLst>
+            <a:gs pos="0">
+              <a:schemeClr val="phClr">
+                <a:tint val="93000"/>
+                <a:satMod val="150000"/>
+                <a:shade val="98000"/>
+                <a:lumMod val="102000"/>
+              </a:schemeClr>
+            </a:gs>
+            <a:gs pos="50000">
+              <a:schemeClr val="phClr">
+                <a:tint val="98000"/>
+                <a:satMod val="130000"/>
+                <a:shade val="90000"/>
+                <a:lumMod val="103000"/>
+              </a:schemeClr>
+            </a:gs>
+            <a:gs pos="100000">
+              <a:schemeClr val="phClr">
+                <a:shade val="63000"/>
+                <a:satMod val="120000"/>
+              </a:schemeClr>
+            </a:gs>
+          </a:gsLst>
+          <a:lin ang="5400000" scaled="0"/>
+        </a:gradFill>
+      </a:bgFillStyleLst>
+    </a:fmtScheme>
+  </a:themeElements>
+  <a:objectDefaults>
+    <a:lnDef>
+      <a:spPr/>
+      <a:bodyPr/>
+      <a:lstStyle/>
+      <a:style>
+        <a:lnRef idx="2">
+          <a:schemeClr val="accent1"/>
+        </a:lnRef>
+        <a:fillRef idx="0">
+          <a:schemeClr val="accent1"/>
+        </a:fillRef>
+        <a:effectRef idx="1">
+          <a:schemeClr val="accent1"/>
+        </a:effectRef>
+        <a:fontRef idx="minor">
+          <a:schemeClr val="tx1"/>
+        </a:fontRef>
+      </a:style>
+    </a:lnDef>
+  </a:objectDefaults>
+  <a:extraClrSchemeLst/>
+  <a:extLst>
+    <a:ext uri="{05A4C25C-085E-4340-85A3-A5531E510DB2}">
+      <thm15:themeFamily xmlns:thm15="http://schemas.microsoft.com/office/thememl/2012/main" name="Office Theme" id="{2E142A2C-CD16-42D6-873A-C26D2A0506FA}" vid="{1BDDFF52-6CD6-40A5-AB3C-68EB2F1E4D0A}"/>
+    </a:ext>
+  </a:extLst>
+</a:theme>
 </file>